--- a/templates/000_pm_suite/01_프로젝트 관리/03_일정관리/프로젝트명_milestone_v0.1_20220329.pptx
+++ b/templates/000_pm_suite/01_프로젝트 관리/03_일정관리/프로젝트명_milestone_v0.1_20220329.pptx
@@ -18490,7 +18490,7 @@
                 <a:cs typeface="Arial"/>
                 <a:sym typeface="Arial"/>
               </a:rPr>
-              <a:t>Master Admin Web</a:t>
+              <a:t>SyncGuard BO 어드민</a:t>
             </a:r>
             <a:endParaRPr b="1" i="0" sz="1000" u="none" cap="none" strike="noStrike">
               <a:solidFill>
@@ -19441,7 +19441,7 @@
                 <a:cs typeface="Arial"/>
                 <a:sym typeface="Arial"/>
               </a:rPr>
-              <a:t>Admin Web 개발</a:t>
+              <a:t>SyncGuard BO 어드민 개발</a:t>
             </a:r>
             <a:endParaRPr b="1" i="0" sz="1000" u="none" cap="none" strike="noStrike">
               <a:solidFill>
@@ -19647,7 +19647,7 @@
                 <a:cs typeface="Arial"/>
                 <a:sym typeface="Arial"/>
               </a:rPr>
-              <a:t>Patient (Main/Sub)</a:t>
+              <a:t>FO 멀티모달 심의포털</a:t>
             </a:r>
             <a:endParaRPr b="0" i="0" sz="1400" u="none" cap="none" strike="noStrike">
               <a:solidFill>
@@ -19687,7 +19687,7 @@
                 <a:cs typeface="Arial"/>
                 <a:sym typeface="Arial"/>
               </a:rPr>
-              <a:t>HCP web (Main/Sub)</a:t>
+              <a:t>3단계 AI 추론 파이프라인</a:t>
             </a:r>
             <a:endParaRPr b="1" i="0" sz="800" u="none" cap="none" strike="noStrike">
               <a:solidFill>
@@ -19917,7 +19917,7 @@
                 <a:cs typeface="Arial"/>
                 <a:sym typeface="Arial"/>
               </a:rPr>
-              <a:t>Master Admin Web</a:t>
+              <a:t>SyncGuard BO 어드민</a:t>
             </a:r>
             <a:endParaRPr b="1" i="0" sz="1000" u="none" cap="none" strike="noStrike">
               <a:solidFill>
@@ -20274,7 +20274,7 @@
                   <a:cs typeface="Arial"/>
                   <a:sym typeface="Arial"/>
                 </a:rPr>
-                <a:t>Neuro Gait App Launch</a:t>
+                <a:t>SyncGuard AI App Launch</a:t>
               </a:r>
               <a:endParaRPr b="1" i="0" sz="800" u="none" cap="none" strike="noStrike">
                 <a:solidFill>
@@ -24589,7 +24589,7 @@
                   <a:cs typeface="Arial"/>
                   <a:sym typeface="Arial"/>
                 </a:rPr>
-                <a:t>Patient (Main/Sub)</a:t>
+                <a:t>FO 멀티모달 심의포털</a:t>
               </a:r>
               <a:endParaRPr b="0" i="0" sz="1400" u="none" cap="none" strike="noStrike">
                 <a:solidFill>
@@ -24629,7 +24629,7 @@
                   <a:cs typeface="Arial"/>
                   <a:sym typeface="Arial"/>
                 </a:rPr>
-                <a:t>HCP web (Main/Sub)</a:t>
+                <a:t>3단계 AI 추론 파이프라인</a:t>
               </a:r>
               <a:endParaRPr b="1" i="0" sz="800" u="none" cap="none" strike="noStrike">
                 <a:solidFill>
@@ -25623,7 +25623,7 @@
                   <a:cs typeface="Arial"/>
                   <a:sym typeface="Arial"/>
                 </a:rPr>
-                <a:t>Master Admin Web</a:t>
+                <a:t>SyncGuard BO 어드민</a:t>
               </a:r>
               <a:endParaRPr b="1" i="0" sz="1000" u="none" cap="none" strike="noStrike">
                 <a:solidFill>
@@ -30322,7 +30322,7 @@
                 <a:cs typeface="Arial"/>
                 <a:sym typeface="Arial"/>
               </a:rPr>
-              <a:t>Patient (Main/Sub)</a:t>
+              <a:t>FO 멀티모달 심의포털</a:t>
             </a:r>
             <a:endParaRPr b="0" i="0" sz="1400" u="none" cap="none" strike="noStrike">
               <a:solidFill>
@@ -30362,7 +30362,7 @@
                 <a:cs typeface="Arial"/>
                 <a:sym typeface="Arial"/>
               </a:rPr>
-              <a:t>HCP web (Main/Sub)</a:t>
+              <a:t>3단계 AI 추론 파이프라인</a:t>
             </a:r>
             <a:endParaRPr b="1" i="0" sz="800" u="none" cap="none" strike="noStrike">
               <a:solidFill>
@@ -31356,7 +31356,7 @@
                 <a:cs typeface="Arial"/>
                 <a:sym typeface="Arial"/>
               </a:rPr>
-              <a:t>Master Admin Web</a:t>
+              <a:t>SyncGuard BO 어드민</a:t>
             </a:r>
             <a:endParaRPr b="1" i="0" sz="1000" u="none" cap="none" strike="noStrike">
               <a:solidFill>
@@ -36620,7 +36620,7 @@
                 <a:cs typeface="Arial"/>
                 <a:sym typeface="Arial"/>
               </a:rPr>
-              <a:t>Patient (Main/Sub)</a:t>
+              <a:t>FO 멀티모달 심의포털</a:t>
             </a:r>
             <a:endParaRPr b="0" i="0" sz="1400" u="none" cap="none" strike="noStrike">
               <a:solidFill>
@@ -36660,7 +36660,7 @@
                 <a:cs typeface="Arial"/>
                 <a:sym typeface="Arial"/>
               </a:rPr>
-              <a:t>HCP web (Main/Sub)</a:t>
+              <a:t>3단계 AI 추론 파이프라인</a:t>
             </a:r>
             <a:endParaRPr b="1" i="0" sz="800" u="none" cap="none" strike="noStrike">
               <a:solidFill>
@@ -36976,7 +36976,7 @@
                 <a:cs typeface="Arial"/>
                 <a:sym typeface="Arial"/>
               </a:rPr>
-              <a:t>Master Admin Web</a:t>
+              <a:t>SyncGuard BO 어드민</a:t>
             </a:r>
             <a:endParaRPr b="1" i="0" sz="1000" u="none" cap="none" strike="noStrike">
               <a:solidFill>
@@ -42950,7 +42950,7 @@
                 <a:cs typeface="Arial"/>
                 <a:sym typeface="Arial"/>
               </a:rPr>
-              <a:t>Patient (Main/Sub)</a:t>
+              <a:t>FO 멀티모달 심의포털</a:t>
             </a:r>
             <a:endParaRPr b="0" i="0" sz="1400" u="none" cap="none" strike="noStrike">
               <a:solidFill>
@@ -42990,7 +42990,7 @@
                 <a:cs typeface="Arial"/>
                 <a:sym typeface="Arial"/>
               </a:rPr>
-              <a:t>HCP web (Main/Sub)</a:t>
+              <a:t>3단계 AI 추론 파이프라인</a:t>
             </a:r>
             <a:endParaRPr b="1" i="0" sz="800" u="none" cap="none" strike="noStrike">
               <a:solidFill>
@@ -43306,7 +43306,7 @@
                 <a:cs typeface="Arial"/>
                 <a:sym typeface="Arial"/>
               </a:rPr>
-              <a:t>Master Admin Web</a:t>
+              <a:t>SyncGuard BO 어드민</a:t>
             </a:r>
             <a:endParaRPr b="1" i="0" sz="1000" u="none" cap="none" strike="noStrike">
               <a:solidFill>
@@ -49249,7 +49249,7 @@
                 <a:cs typeface="Arial"/>
                 <a:sym typeface="Arial"/>
               </a:rPr>
-              <a:t>Patient (Main/Sub)</a:t>
+              <a:t>FO 멀티모달 심의포털</a:t>
             </a:r>
             <a:endParaRPr b="0" i="0" sz="1400" u="none" cap="none" strike="noStrike">
               <a:solidFill>
@@ -49289,7 +49289,7 @@
                 <a:cs typeface="Arial"/>
                 <a:sym typeface="Arial"/>
               </a:rPr>
-              <a:t>HCP web (Main/Sub)</a:t>
+              <a:t>3단계 AI 추론 파이프라인</a:t>
             </a:r>
             <a:endParaRPr b="1" i="0" sz="800" u="none" cap="none" strike="noStrike">
               <a:solidFill>
@@ -49605,7 +49605,7 @@
                 <a:cs typeface="Arial"/>
                 <a:sym typeface="Arial"/>
               </a:rPr>
-              <a:t>Master Admin Web</a:t>
+              <a:t>SyncGuard BO 어드민</a:t>
             </a:r>
             <a:endParaRPr b="1" i="0" sz="1000" u="none" cap="none" strike="noStrike">
               <a:solidFill>
@@ -55548,7 +55548,7 @@
                 <a:cs typeface="Arial"/>
                 <a:sym typeface="Arial"/>
               </a:rPr>
-              <a:t>Patient (Main/Sub)</a:t>
+              <a:t>FO 멀티모달 심의포털</a:t>
             </a:r>
             <a:endParaRPr b="0" i="0" sz="1400" u="none" cap="none" strike="noStrike">
               <a:solidFill>
@@ -55588,7 +55588,7 @@
                 <a:cs typeface="Arial"/>
                 <a:sym typeface="Arial"/>
               </a:rPr>
-              <a:t>HCP web (Main/Sub)</a:t>
+              <a:t>3단계 AI 추론 파이프라인</a:t>
             </a:r>
             <a:endParaRPr b="1" i="0" sz="800" u="none" cap="none" strike="noStrike">
               <a:solidFill>
@@ -55904,7 +55904,7 @@
                 <a:cs typeface="Arial"/>
                 <a:sym typeface="Arial"/>
               </a:rPr>
-              <a:t>Master Admin Web</a:t>
+              <a:t>SyncGuard BO 어드민</a:t>
             </a:r>
             <a:endParaRPr b="1" i="0" sz="1000" u="none" cap="none" strike="noStrike">
               <a:solidFill>

--- a/templates/000_pm_suite/01_프로젝트 관리/03_일정관리/프로젝트명_milestone_v0.1_20220329.pptx
+++ b/templates/000_pm_suite/01_프로젝트 관리/03_일정관리/프로젝트명_milestone_v0.1_20220329.pptx
@@ -18490,7 +18490,7 @@
                 <a:cs typeface="Arial"/>
                 <a:sym typeface="Arial"/>
               </a:rPr>
-              <a:t>SyncGuard BO 어드민</a:t>
+              <a:t>SyncFlow BO 어드민</a:t>
             </a:r>
             <a:endParaRPr b="1" i="0" sz="1000" u="none" cap="none" strike="noStrike">
               <a:solidFill>
@@ -19441,7 +19441,7 @@
                 <a:cs typeface="Arial"/>
                 <a:sym typeface="Arial"/>
               </a:rPr>
-              <a:t>SyncGuard BO 어드민 개발</a:t>
+              <a:t>SyncFlow BO 어드민 개발</a:t>
             </a:r>
             <a:endParaRPr b="1" i="0" sz="1000" u="none" cap="none" strike="noStrike">
               <a:solidFill>
@@ -19647,7 +19647,7 @@
                 <a:cs typeface="Arial"/>
                 <a:sym typeface="Arial"/>
               </a:rPr>
-              <a:t>FO 멀티모달 심의포털</a:t>
+              <a:t>FO 멀티모달 검증포털</a:t>
             </a:r>
             <a:endParaRPr b="0" i="0" sz="1400" u="none" cap="none" strike="noStrike">
               <a:solidFill>
@@ -19917,7 +19917,7 @@
                 <a:cs typeface="Arial"/>
                 <a:sym typeface="Arial"/>
               </a:rPr>
-              <a:t>SyncGuard BO 어드민</a:t>
+              <a:t>SyncFlow BO 어드민</a:t>
             </a:r>
             <a:endParaRPr b="1" i="0" sz="1000" u="none" cap="none" strike="noStrike">
               <a:solidFill>
@@ -20274,7 +20274,7 @@
                   <a:cs typeface="Arial"/>
                   <a:sym typeface="Arial"/>
                 </a:rPr>
-                <a:t>SyncGuard AI App Launch</a:t>
+                <a:t>SyncFlow AI App Launch</a:t>
               </a:r>
               <a:endParaRPr b="1" i="0" sz="800" u="none" cap="none" strike="noStrike">
                 <a:solidFill>
@@ -24589,7 +24589,7 @@
                   <a:cs typeface="Arial"/>
                   <a:sym typeface="Arial"/>
                 </a:rPr>
-                <a:t>FO 멀티모달 심의포털</a:t>
+                <a:t>FO 멀티모달 검증포털</a:t>
               </a:r>
               <a:endParaRPr b="0" i="0" sz="1400" u="none" cap="none" strike="noStrike">
                 <a:solidFill>
@@ -25623,7 +25623,7 @@
                   <a:cs typeface="Arial"/>
                   <a:sym typeface="Arial"/>
                 </a:rPr>
-                <a:t>SyncGuard BO 어드민</a:t>
+                <a:t>SyncFlow BO 어드민</a:t>
               </a:r>
               <a:endParaRPr b="1" i="0" sz="1000" u="none" cap="none" strike="noStrike">
                 <a:solidFill>
@@ -30322,7 +30322,7 @@
                 <a:cs typeface="Arial"/>
                 <a:sym typeface="Arial"/>
               </a:rPr>
-              <a:t>FO 멀티모달 심의포털</a:t>
+              <a:t>FO 멀티모달 검증포털</a:t>
             </a:r>
             <a:endParaRPr b="0" i="0" sz="1400" u="none" cap="none" strike="noStrike">
               <a:solidFill>
@@ -31356,7 +31356,7 @@
                 <a:cs typeface="Arial"/>
                 <a:sym typeface="Arial"/>
               </a:rPr>
-              <a:t>SyncGuard BO 어드민</a:t>
+              <a:t>SyncFlow BO 어드민</a:t>
             </a:r>
             <a:endParaRPr b="1" i="0" sz="1000" u="none" cap="none" strike="noStrike">
               <a:solidFill>
@@ -36620,7 +36620,7 @@
                 <a:cs typeface="Arial"/>
                 <a:sym typeface="Arial"/>
               </a:rPr>
-              <a:t>FO 멀티모달 심의포털</a:t>
+              <a:t>FO 멀티모달 검증포털</a:t>
             </a:r>
             <a:endParaRPr b="0" i="0" sz="1400" u="none" cap="none" strike="noStrike">
               <a:solidFill>
@@ -36976,7 +36976,7 @@
                 <a:cs typeface="Arial"/>
                 <a:sym typeface="Arial"/>
               </a:rPr>
-              <a:t>SyncGuard BO 어드민</a:t>
+              <a:t>SyncFlow BO 어드민</a:t>
             </a:r>
             <a:endParaRPr b="1" i="0" sz="1000" u="none" cap="none" strike="noStrike">
               <a:solidFill>
@@ -42950,7 +42950,7 @@
                 <a:cs typeface="Arial"/>
                 <a:sym typeface="Arial"/>
               </a:rPr>
-              <a:t>FO 멀티모달 심의포털</a:t>
+              <a:t>FO 멀티모달 검증포털</a:t>
             </a:r>
             <a:endParaRPr b="0" i="0" sz="1400" u="none" cap="none" strike="noStrike">
               <a:solidFill>
@@ -43306,7 +43306,7 @@
                 <a:cs typeface="Arial"/>
                 <a:sym typeface="Arial"/>
               </a:rPr>
-              <a:t>SyncGuard BO 어드민</a:t>
+              <a:t>SyncFlow BO 어드민</a:t>
             </a:r>
             <a:endParaRPr b="1" i="0" sz="1000" u="none" cap="none" strike="noStrike">
               <a:solidFill>
@@ -49249,7 +49249,7 @@
                 <a:cs typeface="Arial"/>
                 <a:sym typeface="Arial"/>
               </a:rPr>
-              <a:t>FO 멀티모달 심의포털</a:t>
+              <a:t>FO 멀티모달 검증포털</a:t>
             </a:r>
             <a:endParaRPr b="0" i="0" sz="1400" u="none" cap="none" strike="noStrike">
               <a:solidFill>
@@ -49605,7 +49605,7 @@
                 <a:cs typeface="Arial"/>
                 <a:sym typeface="Arial"/>
               </a:rPr>
-              <a:t>SyncGuard BO 어드민</a:t>
+              <a:t>SyncFlow BO 어드민</a:t>
             </a:r>
             <a:endParaRPr b="1" i="0" sz="1000" u="none" cap="none" strike="noStrike">
               <a:solidFill>
@@ -55548,7 +55548,7 @@
                 <a:cs typeface="Arial"/>
                 <a:sym typeface="Arial"/>
               </a:rPr>
-              <a:t>FO 멀티모달 심의포털</a:t>
+              <a:t>FO 멀티모달 검증포털</a:t>
             </a:r>
             <a:endParaRPr b="0" i="0" sz="1400" u="none" cap="none" strike="noStrike">
               <a:solidFill>
@@ -55904,7 +55904,7 @@
                 <a:cs typeface="Arial"/>
                 <a:sym typeface="Arial"/>
               </a:rPr>
-              <a:t>SyncGuard BO 어드민</a:t>
+              <a:t>SyncFlow BO 어드민</a:t>
             </a:r>
             <a:endParaRPr b="1" i="0" sz="1000" u="none" cap="none" strike="noStrike">
               <a:solidFill>
